--- a/AI_for_Finance_Course/Slides/Class_02_Financial_Data_Engineering.pptx
+++ b/AI_for_Finance_Course/Slides/Class_02_Financial_Data_Engineering.pptx
@@ -498,6 +498,10 @@
           </p:nvPr>
         </p:nvSpPr>
         <p:spPr/>
+        <p:txBody>
+          <a:bodyPr/>
+          <a:p/>
+        </p:txBody>
       </p:sp>
       <p:sp>
         <p:nvSpPr>
@@ -586,6 +590,10 @@
           </p:nvPr>
         </p:nvSpPr>
         <p:spPr/>
+        <p:txBody>
+          <a:bodyPr/>
+          <a:p/>
+        </p:txBody>
       </p:sp>
       <p:sp>
         <p:nvSpPr>
@@ -674,6 +682,10 @@
           </p:nvPr>
         </p:nvSpPr>
         <p:spPr/>
+        <p:txBody>
+          <a:bodyPr/>
+          <a:p/>
+        </p:txBody>
       </p:sp>
       <p:sp>
         <p:nvSpPr>
@@ -762,6 +774,10 @@
           </p:nvPr>
         </p:nvSpPr>
         <p:spPr/>
+        <p:txBody>
+          <a:bodyPr/>
+          <a:p/>
+        </p:txBody>
       </p:sp>
       <p:sp>
         <p:nvSpPr>
@@ -850,6 +866,10 @@
           </p:nvPr>
         </p:nvSpPr>
         <p:spPr/>
+        <p:txBody>
+          <a:bodyPr/>
+          <a:p/>
+        </p:txBody>
       </p:sp>
       <p:sp>
         <p:nvSpPr>
@@ -938,6 +958,10 @@
           </p:nvPr>
         </p:nvSpPr>
         <p:spPr/>
+        <p:txBody>
+          <a:bodyPr/>
+          <a:p/>
+        </p:txBody>
       </p:sp>
       <p:sp>
         <p:nvSpPr>
@@ -1026,6 +1050,10 @@
           </p:nvPr>
         </p:nvSpPr>
         <p:spPr/>
+        <p:txBody>
+          <a:bodyPr/>
+          <a:p/>
+        </p:txBody>
       </p:sp>
       <p:sp>
         <p:nvSpPr>
@@ -1114,6 +1142,10 @@
           </p:nvPr>
         </p:nvSpPr>
         <p:spPr/>
+        <p:txBody>
+          <a:bodyPr/>
+          <a:p/>
+        </p:txBody>
       </p:sp>
       <p:sp>
         <p:nvSpPr>
@@ -1202,6 +1234,10 @@
           </p:nvPr>
         </p:nvSpPr>
         <p:spPr/>
+        <p:txBody>
+          <a:bodyPr/>
+          <a:p/>
+        </p:txBody>
       </p:sp>
       <p:sp>
         <p:nvSpPr>
@@ -1290,6 +1326,10 @@
           </p:nvPr>
         </p:nvSpPr>
         <p:spPr/>
+        <p:txBody>
+          <a:bodyPr/>
+          <a:p/>
+        </p:txBody>
       </p:sp>
       <p:sp>
         <p:nvSpPr>
@@ -1378,6 +1418,10 @@
           </p:nvPr>
         </p:nvSpPr>
         <p:spPr/>
+        <p:txBody>
+          <a:bodyPr/>
+          <a:p/>
+        </p:txBody>
       </p:sp>
       <p:sp>
         <p:nvSpPr>
@@ -1466,6 +1510,10 @@
           </p:nvPr>
         </p:nvSpPr>
         <p:spPr/>
+        <p:txBody>
+          <a:bodyPr/>
+          <a:p/>
+        </p:txBody>
       </p:sp>
       <p:sp>
         <p:nvSpPr>
@@ -1554,6 +1602,10 @@
           </p:nvPr>
         </p:nvSpPr>
         <p:spPr/>
+        <p:txBody>
+          <a:bodyPr/>
+          <a:p/>
+        </p:txBody>
       </p:sp>
       <p:sp>
         <p:nvSpPr>
@@ -1642,6 +1694,10 @@
           </p:nvPr>
         </p:nvSpPr>
         <p:spPr/>
+        <p:txBody>
+          <a:bodyPr/>
+          <a:p/>
+        </p:txBody>
       </p:sp>
       <p:sp>
         <p:nvSpPr>
@@ -1730,6 +1786,10 @@
           </p:nvPr>
         </p:nvSpPr>
         <p:spPr/>
+        <p:txBody>
+          <a:bodyPr/>
+          <a:p/>
+        </p:txBody>
       </p:sp>
       <p:sp>
         <p:nvSpPr>
@@ -2367,6 +2427,10 @@
           </a:solidFill>
           <a:ln/>
         </p:spPr>
+        <p:txBody>
+          <a:bodyPr/>
+          <a:p/>
+        </p:txBody>
       </p:sp>
       <p:sp>
         <p:nvSpPr>
@@ -2465,6 +2529,10 @@
           </a:solidFill>
           <a:ln/>
         </p:spPr>
+        <p:txBody>
+          <a:bodyPr/>
+          <a:p/>
+        </p:txBody>
       </p:sp>
       <p:sp>
         <p:nvSpPr>
@@ -2644,6 +2712,10 @@
           </a:solidFill>
           <a:ln/>
         </p:spPr>
+        <p:txBody>
+          <a:bodyPr/>
+          <a:p/>
+        </p:txBody>
       </p:sp>
       <p:sp>
         <p:nvSpPr>
@@ -2823,6 +2895,10 @@
           </a:solidFill>
           <a:ln/>
         </p:spPr>
+        <p:txBody>
+          <a:bodyPr/>
+          <a:p/>
+        </p:txBody>
       </p:sp>
       <p:sp>
         <p:nvSpPr>
@@ -3034,6 +3110,10 @@
           </a:solidFill>
           <a:ln/>
         </p:spPr>
+        <p:txBody>
+          <a:bodyPr/>
+          <a:p/>
+        </p:txBody>
       </p:sp>
       <p:sp>
         <p:nvSpPr>
@@ -3132,6 +3212,10 @@
           </a:solidFill>
           <a:ln/>
         </p:spPr>
+        <p:txBody>
+          <a:bodyPr/>
+          <a:p/>
+        </p:txBody>
       </p:sp>
       <p:sp>
         <p:nvSpPr>
@@ -3230,6 +3314,10 @@
           </a:solidFill>
           <a:ln/>
         </p:spPr>
+        <p:txBody>
+          <a:bodyPr/>
+          <a:p/>
+        </p:txBody>
       </p:sp>
       <p:sp>
         <p:nvSpPr>
@@ -3328,6 +3416,10 @@
           </a:solidFill>
           <a:ln/>
         </p:spPr>
+        <p:txBody>
+          <a:bodyPr/>
+          <a:p/>
+        </p:txBody>
       </p:sp>
       <p:sp>
         <p:nvSpPr>
@@ -3458,6 +3550,10 @@
           </a:solidFill>
           <a:ln/>
         </p:spPr>
+        <p:txBody>
+          <a:bodyPr/>
+          <a:p/>
+        </p:txBody>
       </p:sp>
       <p:sp>
         <p:nvSpPr>
@@ -3561,6 +3657,10 @@
             <a:prstDash val="solid"/>
           </a:ln>
         </p:spPr>
+        <p:txBody>
+          <a:bodyPr/>
+          <a:p/>
+        </p:txBody>
       </p:sp>
       <p:sp>
         <p:nvSpPr>
@@ -3664,6 +3764,10 @@
             <a:prstDash val="solid"/>
           </a:ln>
         </p:spPr>
+        <p:txBody>
+          <a:bodyPr/>
+          <a:p/>
+        </p:txBody>
       </p:sp>
       <p:sp>
         <p:nvSpPr>
@@ -3767,6 +3871,10 @@
             <a:prstDash val="solid"/>
           </a:ln>
         </p:spPr>
+        <p:txBody>
+          <a:bodyPr/>
+          <a:p/>
+        </p:txBody>
       </p:sp>
       <p:sp>
         <p:nvSpPr>
@@ -3870,6 +3978,10 @@
             <a:prstDash val="solid"/>
           </a:ln>
         </p:spPr>
+        <p:txBody>
+          <a:bodyPr/>
+          <a:p/>
+        </p:txBody>
       </p:sp>
       <p:sp>
         <p:nvSpPr>
@@ -4000,6 +4112,10 @@
           </a:solidFill>
           <a:ln/>
         </p:spPr>
+        <p:txBody>
+          <a:bodyPr/>
+          <a:p/>
+        </p:txBody>
       </p:sp>
       <p:sp>
         <p:nvSpPr>
@@ -4370,6 +4486,10 @@
           </a:solidFill>
           <a:ln/>
         </p:spPr>
+        <p:txBody>
+          <a:bodyPr/>
+          <a:p/>
+        </p:txBody>
       </p:sp>
       <p:sp>
         <p:nvSpPr>
@@ -4473,6 +4593,10 @@
             <a:prstDash val="solid"/>
           </a:ln>
         </p:spPr>
+        <p:txBody>
+          <a:bodyPr/>
+          <a:p/>
+        </p:txBody>
       </p:sp>
       <p:sp>
         <p:nvSpPr>
@@ -4537,6 +4661,10 @@
             <a:prstDash val="solid"/>
           </a:ln>
         </p:spPr>
+        <p:txBody>
+          <a:bodyPr/>
+          <a:p/>
+        </p:txBody>
       </p:sp>
       <p:sp>
         <p:nvSpPr>
@@ -4601,6 +4729,10 @@
             <a:prstDash val="solid"/>
           </a:ln>
         </p:spPr>
+        <p:txBody>
+          <a:bodyPr/>
+          <a:p/>
+        </p:txBody>
       </p:sp>
       <p:sp>
         <p:nvSpPr>
@@ -4665,6 +4797,10 @@
             <a:prstDash val="solid"/>
           </a:ln>
         </p:spPr>
+        <p:txBody>
+          <a:bodyPr/>
+          <a:p/>
+        </p:txBody>
       </p:sp>
       <p:sp>
         <p:nvSpPr>
@@ -4729,6 +4865,10 @@
             <a:prstDash val="solid"/>
           </a:ln>
         </p:spPr>
+        <p:txBody>
+          <a:bodyPr/>
+          <a:p/>
+        </p:txBody>
       </p:sp>
       <p:sp>
         <p:nvSpPr>
@@ -4873,7 +5013,7 @@
                 <a:ea typeface="Calibri" pitchFamily="34" charset="-122"/>
                 <a:cs typeface="Calibri" pitchFamily="34" charset="-120"/>
               </a:rPr>
-              <a:t>www.proxiant.com</a:t>
+              <a:t>proxiant.ai</a:t>
             </a:r>
             <a:endParaRPr lang="en-US" sz="2800" dirty="0"/>
           </a:p>
@@ -4969,6 +5109,10 @@
           </a:solidFill>
           <a:ln/>
         </p:spPr>
+        <p:txBody>
+          <a:bodyPr/>
+          <a:p/>
+        </p:txBody>
       </p:sp>
       <p:sp>
         <p:nvSpPr>
@@ -5338,6 +5482,10 @@
           </a:solidFill>
           <a:ln/>
         </p:spPr>
+        <p:txBody>
+          <a:bodyPr/>
+          <a:p/>
+        </p:txBody>
       </p:sp>
       <p:sp>
         <p:nvSpPr>
@@ -5436,6 +5584,10 @@
           </a:solidFill>
           <a:ln/>
         </p:spPr>
+        <p:txBody>
+          <a:bodyPr/>
+          <a:p/>
+        </p:txBody>
       </p:sp>
       <p:sp>
         <p:nvSpPr>
@@ -5534,6 +5686,10 @@
           </a:solidFill>
           <a:ln/>
         </p:spPr>
+        <p:txBody>
+          <a:bodyPr/>
+          <a:p/>
+        </p:txBody>
       </p:sp>
       <p:sp>
         <p:nvSpPr>
@@ -5632,6 +5788,10 @@
           </a:solidFill>
           <a:ln/>
         </p:spPr>
+        <p:txBody>
+          <a:bodyPr/>
+          <a:p/>
+        </p:txBody>
       </p:sp>
       <p:sp>
         <p:nvSpPr>
@@ -5730,6 +5890,10 @@
           </a:solidFill>
           <a:ln/>
         </p:spPr>
+        <p:txBody>
+          <a:bodyPr/>
+          <a:p/>
+        </p:txBody>
       </p:sp>
       <p:sp>
         <p:nvSpPr>
@@ -5860,6 +6024,10 @@
           </a:solidFill>
           <a:ln/>
         </p:spPr>
+        <p:txBody>
+          <a:bodyPr/>
+          <a:p/>
+        </p:txBody>
       </p:sp>
       <p:sp>
         <p:nvSpPr>
@@ -5958,6 +6126,10 @@
           </a:solidFill>
           <a:ln/>
         </p:spPr>
+        <p:txBody>
+          <a:bodyPr/>
+          <a:p/>
+        </p:txBody>
       </p:sp>
       <p:sp>
         <p:nvSpPr>
@@ -6020,6 +6192,10 @@
             <a:prstDash val="solid"/>
           </a:ln>
         </p:spPr>
+        <p:txBody>
+          <a:bodyPr/>
+          <a:p/>
+        </p:txBody>
       </p:sp>
       <p:sp>
         <p:nvSpPr>
@@ -6040,6 +6216,10 @@
           </a:solidFill>
           <a:ln/>
         </p:spPr>
+        <p:txBody>
+          <a:bodyPr/>
+          <a:p/>
+        </p:txBody>
       </p:sp>
       <p:sp>
         <p:nvSpPr>
@@ -6102,6 +6282,10 @@
             <a:prstDash val="solid"/>
           </a:ln>
         </p:spPr>
+        <p:txBody>
+          <a:bodyPr/>
+          <a:p/>
+        </p:txBody>
       </p:sp>
       <p:sp>
         <p:nvSpPr>
@@ -6122,6 +6306,10 @@
           </a:solidFill>
           <a:ln/>
         </p:spPr>
+        <p:txBody>
+          <a:bodyPr/>
+          <a:p/>
+        </p:txBody>
       </p:sp>
       <p:sp>
         <p:nvSpPr>
@@ -6184,6 +6372,10 @@
             <a:prstDash val="solid"/>
           </a:ln>
         </p:spPr>
+        <p:txBody>
+          <a:bodyPr/>
+          <a:p/>
+        </p:txBody>
       </p:sp>
       <p:sp>
         <p:nvSpPr>
@@ -6204,6 +6396,10 @@
           </a:solidFill>
           <a:ln/>
         </p:spPr>
+        <p:txBody>
+          <a:bodyPr/>
+          <a:p/>
+        </p:txBody>
       </p:sp>
       <p:sp>
         <p:nvSpPr>
@@ -6266,6 +6462,10 @@
             <a:prstDash val="solid"/>
           </a:ln>
         </p:spPr>
+        <p:txBody>
+          <a:bodyPr/>
+          <a:p/>
+        </p:txBody>
       </p:sp>
       <p:sp>
         <p:nvSpPr>
@@ -6286,6 +6486,10 @@
           </a:solidFill>
           <a:ln/>
         </p:spPr>
+        <p:txBody>
+          <a:bodyPr/>
+          <a:p/>
+        </p:txBody>
       </p:sp>
       <p:sp>
         <p:nvSpPr>
@@ -6572,6 +6776,10 @@
           </a:solidFill>
           <a:ln/>
         </p:spPr>
+        <p:txBody>
+          <a:bodyPr/>
+          <a:p/>
+        </p:txBody>
       </p:sp>
       <p:sp>
         <p:nvSpPr>
@@ -6675,6 +6883,10 @@
             <a:prstDash val="solid"/>
           </a:ln>
         </p:spPr>
+        <p:txBody>
+          <a:bodyPr/>
+          <a:p/>
+        </p:txBody>
       </p:sp>
       <p:sp>
         <p:nvSpPr>
@@ -6778,6 +6990,10 @@
             <a:prstDash val="solid"/>
           </a:ln>
         </p:spPr>
+        <p:txBody>
+          <a:bodyPr/>
+          <a:p/>
+        </p:txBody>
       </p:sp>
       <p:sp>
         <p:nvSpPr>
@@ -6881,6 +7097,10 @@
             <a:prstDash val="solid"/>
           </a:ln>
         </p:spPr>
+        <p:txBody>
+          <a:bodyPr/>
+          <a:p/>
+        </p:txBody>
       </p:sp>
       <p:sp>
         <p:nvSpPr>
@@ -6984,6 +7204,10 @@
             <a:prstDash val="solid"/>
           </a:ln>
         </p:spPr>
+        <p:txBody>
+          <a:bodyPr/>
+          <a:p/>
+        </p:txBody>
       </p:sp>
       <p:sp>
         <p:nvSpPr>
@@ -7114,6 +7338,10 @@
           </a:solidFill>
           <a:ln/>
         </p:spPr>
+        <p:txBody>
+          <a:bodyPr/>
+          <a:p/>
+        </p:txBody>
       </p:sp>
       <p:sp>
         <p:nvSpPr>
@@ -7212,6 +7440,10 @@
           </a:solidFill>
           <a:ln/>
         </p:spPr>
+        <p:txBody>
+          <a:bodyPr/>
+          <a:p/>
+        </p:txBody>
       </p:sp>
       <p:sp>
         <p:nvSpPr>
@@ -7310,6 +7542,10 @@
           </a:solidFill>
           <a:ln/>
         </p:spPr>
+        <p:txBody>
+          <a:bodyPr/>
+          <a:p/>
+        </p:txBody>
       </p:sp>
       <p:sp>
         <p:nvSpPr>
@@ -7408,6 +7644,10 @@
           </a:solidFill>
           <a:ln/>
         </p:spPr>
+        <p:txBody>
+          <a:bodyPr/>
+          <a:p/>
+        </p:txBody>
       </p:sp>
       <p:sp>
         <p:nvSpPr>
@@ -7506,6 +7746,10 @@
           </a:solidFill>
           <a:ln/>
         </p:spPr>
+        <p:txBody>
+          <a:bodyPr/>
+          <a:p/>
+        </p:txBody>
       </p:sp>
       <p:sp>
         <p:nvSpPr>
@@ -7604,6 +7848,10 @@
           </a:solidFill>
           <a:ln/>
         </p:spPr>
+        <p:txBody>
+          <a:bodyPr/>
+          <a:p/>
+        </p:txBody>
       </p:sp>
       <p:sp>
         <p:nvSpPr>
@@ -7734,6 +7982,10 @@
           </a:solidFill>
           <a:ln/>
         </p:spPr>
+        <p:txBody>
+          <a:bodyPr/>
+          <a:p/>
+        </p:txBody>
       </p:sp>
       <p:sp>
         <p:nvSpPr>
@@ -7832,6 +8084,10 @@
           </a:solidFill>
           <a:ln/>
         </p:spPr>
+        <p:txBody>
+          <a:bodyPr/>
+          <a:p/>
+        </p:txBody>
       </p:sp>
       <p:sp>
         <p:nvSpPr>
@@ -7930,6 +8186,10 @@
           </a:solidFill>
           <a:ln/>
         </p:spPr>
+        <p:txBody>
+          <a:bodyPr/>
+          <a:p/>
+        </p:txBody>
       </p:sp>
       <p:sp>
         <p:nvSpPr>
@@ -8028,6 +8288,10 @@
           </a:solidFill>
           <a:ln/>
         </p:spPr>
+        <p:txBody>
+          <a:bodyPr/>
+          <a:p/>
+        </p:txBody>
       </p:sp>
       <p:sp>
         <p:nvSpPr>
@@ -8126,6 +8390,10 @@
           </a:solidFill>
           <a:ln/>
         </p:spPr>
+        <p:txBody>
+          <a:bodyPr/>
+          <a:p/>
+        </p:txBody>
       </p:sp>
       <p:sp>
         <p:nvSpPr>
@@ -8224,6 +8492,10 @@
           </a:solidFill>
           <a:ln/>
         </p:spPr>
+        <p:txBody>
+          <a:bodyPr/>
+          <a:p/>
+        </p:txBody>
       </p:sp>
       <p:sp>
         <p:nvSpPr>
@@ -8354,6 +8626,10 @@
           </a:solidFill>
           <a:ln/>
         </p:spPr>
+        <p:txBody>
+          <a:bodyPr/>
+          <a:p/>
+        </p:txBody>
       </p:sp>
       <p:sp>
         <p:nvSpPr>
@@ -8452,6 +8728,10 @@
           </a:solidFill>
           <a:ln/>
         </p:spPr>
+        <p:txBody>
+          <a:bodyPr/>
+          <a:p/>
+        </p:txBody>
       </p:sp>
       <p:sp>
         <p:nvSpPr>
@@ -8550,6 +8830,10 @@
           </a:solidFill>
           <a:ln/>
         </p:spPr>
+        <p:txBody>
+          <a:bodyPr/>
+          <a:p/>
+        </p:txBody>
       </p:sp>
       <p:sp>
         <p:nvSpPr>
@@ -8648,6 +8932,10 @@
           </a:solidFill>
           <a:ln/>
         </p:spPr>
+        <p:txBody>
+          <a:bodyPr/>
+          <a:p/>
+        </p:txBody>
       </p:sp>
       <p:sp>
         <p:nvSpPr>
@@ -8746,6 +9034,10 @@
           </a:solidFill>
           <a:ln/>
         </p:spPr>
+        <p:txBody>
+          <a:bodyPr/>
+          <a:p/>
+        </p:txBody>
       </p:sp>
       <p:sp>
         <p:nvSpPr>
@@ -8876,6 +9168,10 @@
           </a:solidFill>
           <a:ln/>
         </p:spPr>
+        <p:txBody>
+          <a:bodyPr/>
+          <a:p/>
+        </p:txBody>
       </p:sp>
       <p:sp>
         <p:nvSpPr>
@@ -8979,6 +9275,10 @@
             <a:prstDash val="solid"/>
           </a:ln>
         </p:spPr>
+        <p:txBody>
+          <a:bodyPr/>
+          <a:p/>
+        </p:txBody>
       </p:sp>
       <p:sp>
         <p:nvSpPr>
@@ -9082,6 +9382,10 @@
             <a:prstDash val="solid"/>
           </a:ln>
         </p:spPr>
+        <p:txBody>
+          <a:bodyPr/>
+          <a:p/>
+        </p:txBody>
       </p:sp>
       <p:sp>
         <p:nvSpPr>
@@ -9185,6 +9489,10 @@
             <a:prstDash val="solid"/>
           </a:ln>
         </p:spPr>
+        <p:txBody>
+          <a:bodyPr/>
+          <a:p/>
+        </p:txBody>
       </p:sp>
       <p:sp>
         <p:nvSpPr>
@@ -9288,6 +9596,10 @@
             <a:prstDash val="solid"/>
           </a:ln>
         </p:spPr>
+        <p:txBody>
+          <a:bodyPr/>
+          <a:p/>
+        </p:txBody>
       </p:sp>
       <p:sp>
         <p:nvSpPr>
